--- a/prezentatsiya_AeroBaku.Бахшиев.Рахин.680.23.pptx
+++ b/prezentatsiya_AeroBaku.Бахшиев.Рахин.680.23.pptx
@@ -5,15 +5,16 @@
     <p:sldMasterId id="2147483648" r:id="rId1"/>
   </p:sldMasterIdLst>
   <p:notesMasterIdLst>
-    <p:notesMasterId r:id="rId8"/>
+    <p:notesMasterId r:id="rId9"/>
   </p:notesMasterIdLst>
   <p:sldIdLst>
     <p:sldId id="256" r:id="rId2"/>
     <p:sldId id="257" r:id="rId3"/>
-    <p:sldId id="258" r:id="rId4"/>
-    <p:sldId id="259" r:id="rId5"/>
-    <p:sldId id="260" r:id="rId6"/>
-    <p:sldId id="261" r:id="rId7"/>
+    <p:sldId id="263" r:id="rId4"/>
+    <p:sldId id="258" r:id="rId5"/>
+    <p:sldId id="259" r:id="rId6"/>
+    <p:sldId id="260" r:id="rId7"/>
+    <p:sldId id="261" r:id="rId8"/>
   </p:sldIdLst>
   <p:sldSz cx="12192000" cy="6858000"/>
   <p:notesSz cx="6858000" cy="12192000"/>
@@ -484,7 +485,7 @@
     </p:spTree>
     <p:extLst>
       <p:ext uri="{BB962C8B-B14F-4D97-AF65-F5344CB8AC3E}">
-        <p14:creationId xmlns:p14="http://schemas.microsoft.com/office/powerpoint/2010/main" val="1024086991"/>
+        <p14:creationId xmlns:p14="http://schemas.microsoft.com/office/powerpoint/2010/main" val="2217817590"/>
       </p:ext>
     </p:extLst>
   </p:cSld>
@@ -728,6 +729,90 @@
             <a:fld id="{F7021451-1387-4CA6-816F-3879F97B5CBC}" type="slidenum">
               <a:rPr lang="en-US"/>
               <a:t>6</a:t>
+            </a:fld>
+            <a:endParaRPr lang="en-US"/>
+          </a:p>
+        </p:txBody>
+      </p:sp>
+    </p:spTree>
+    <p:extLst>
+      <p:ext uri="{BB962C8B-B14F-4D97-AF65-F5344CB8AC3E}">
+        <p14:creationId xmlns:p14="http://schemas.microsoft.com/office/powerpoint/2010/main" val="1024086991"/>
+      </p:ext>
+    </p:extLst>
+  </p:cSld>
+  <p:clrMapOvr>
+    <a:masterClrMapping/>
+  </p:clrMapOvr>
+</p:notes>
+</file>
+
+<file path=ppt/notesSlides/notesSlide7.xml><?xml version="1.0" encoding="utf-8"?>
+<p:notes xmlns:a="http://schemas.openxmlformats.org/drawingml/2006/main" xmlns:r="http://schemas.openxmlformats.org/officeDocument/2006/relationships" xmlns:p="http://schemas.openxmlformats.org/presentationml/2006/main">
+  <p:cSld>
+    <p:spTree>
+      <p:nvGrpSpPr>
+        <p:cNvPr id="1" name=""/>
+        <p:cNvGrpSpPr/>
+        <p:nvPr/>
+      </p:nvGrpSpPr>
+      <p:grpSpPr>
+        <a:xfrm>
+          <a:off x="0" y="0"/>
+          <a:ext cx="0" cy="0"/>
+          <a:chOff x="0" y="0"/>
+          <a:chExt cx="0" cy="0"/>
+        </a:xfrm>
+      </p:grpSpPr>
+      <p:sp>
+        <p:nvSpPr>
+          <p:cNvPr id="2" name="Slide Image Placeholder 1"/>
+          <p:cNvSpPr>
+            <a:spLocks noGrp="1" noRot="1" noChangeAspect="1"/>
+          </p:cNvSpPr>
+          <p:nvPr>
+            <p:ph type="sldImg"/>
+          </p:nvPr>
+        </p:nvSpPr>
+        <p:spPr/>
+      </p:sp>
+      <p:sp>
+        <p:nvSpPr>
+          <p:cNvPr id="3" name="Notes Placeholder 2"/>
+          <p:cNvSpPr>
+            <a:spLocks noGrp="1"/>
+          </p:cNvSpPr>
+          <p:nvPr>
+            <p:ph type="body" idx="1"/>
+          </p:nvPr>
+        </p:nvSpPr>
+        <p:spPr/>
+        <p:txBody>
+          <a:bodyPr/>
+          <a:lstStyle/>
+          <a:p>
+            <a:endParaRPr lang="en-US" dirty="0"/>
+          </a:p>
+        </p:txBody>
+      </p:sp>
+      <p:sp>
+        <p:nvSpPr>
+          <p:cNvPr id="4" name="Slide Number Placeholder 3"/>
+          <p:cNvSpPr>
+            <a:spLocks noGrp="1"/>
+          </p:cNvSpPr>
+          <p:nvPr>
+            <p:ph type="sldNum" sz="quarter" idx="10"/>
+          </p:nvPr>
+        </p:nvSpPr>
+        <p:spPr/>
+        <p:txBody>
+          <a:bodyPr/>
+          <a:lstStyle/>
+          <a:p>
+            <a:fld id="{F7021451-1387-4CA6-816F-3879F97B5CBC}" type="slidenum">
+              <a:rPr lang="en-US"/>
+              <a:t>7</a:t>
             </a:fld>
             <a:endParaRPr lang="en-US"/>
           </a:p>
@@ -2065,7 +2150,7 @@
         </p:nvSpPr>
         <p:spPr>
           <a:xfrm>
-            <a:off x="0" y="-164123"/>
+            <a:off x="0" y="-523631"/>
             <a:ext cx="12191695" cy="6858000"/>
           </a:xfrm>
           <a:prstGeom prst="rect">
@@ -2092,7 +2177,7 @@
         </p:nvSpPr>
         <p:spPr>
           <a:xfrm>
-            <a:off x="0" y="0"/>
+            <a:off x="0" y="-7815"/>
             <a:ext cx="12191695" cy="621792"/>
           </a:xfrm>
           <a:prstGeom prst="rect">
@@ -2469,42 +2554,15 @@
         </p:spPr>
         <p:txBody>
           <a:bodyPr wrap="square" lIns="0" tIns="0" rIns="0" bIns="0" rtlCol="0" anchor="ctr">
-            <a:normAutofit fontScale="92500" lnSpcReduction="10000"/>
+            <a:normAutofit/>
           </a:bodyPr>
           <a:lstStyle/>
           <a:p>
-            <a:pPr marL="0" indent="0">
-              <a:buNone/>
-            </a:pPr>
-            <a:r>
-              <a:rPr lang="en-US" sz="2800" b="1" dirty="0">
-                <a:solidFill>
-                  <a:srgbClr val="0D2340"/>
-                </a:solidFill>
-                <a:latin typeface="Segoe UI" pitchFamily="34" charset="0"/>
-                <a:ea typeface="Segoe UI" pitchFamily="34" charset="-122"/>
-                <a:cs typeface="Segoe UI" pitchFamily="34" charset="-120"/>
-              </a:rPr>
-              <a:t>Что должна решать</a:t>
-            </a:r>
-            <a:endParaRPr lang="en-US" sz="2800" dirty="0"/>
-          </a:p>
-          <a:p>
-            <a:pPr marL="0" indent="0">
-              <a:buNone/>
-            </a:pPr>
-            <a:r>
-              <a:rPr lang="en-US" sz="2800" b="1" dirty="0">
-                <a:solidFill>
-                  <a:srgbClr val="0D2340"/>
-                </a:solidFill>
-                <a:latin typeface="Segoe UI" pitchFamily="34" charset="0"/>
-                <a:ea typeface="Segoe UI" pitchFamily="34" charset="-122"/>
-                <a:cs typeface="Segoe UI" pitchFamily="34" charset="-120"/>
-              </a:rPr>
-              <a:t>информационная система</a:t>
-            </a:r>
-            <a:endParaRPr lang="en-US" sz="2800" dirty="0"/>
+            <a:r>
+              <a:rPr lang="ru-RU" sz="2800" b="1" dirty="0"/>
+              <a:t>Цель и задачи разработки</a:t>
+            </a:r>
+            <a:endParaRPr lang="en-US" sz="2800" b="1" dirty="0"/>
           </a:p>
         </p:txBody>
       </p:sp>
@@ -2991,6 +3049,1262 @@
 </file>
 
 <file path=ppt/slides/slide3.xml><?xml version="1.0" encoding="utf-8"?>
+<p:sld xmlns:a="http://schemas.openxmlformats.org/drawingml/2006/main" xmlns:r="http://schemas.openxmlformats.org/officeDocument/2006/relationships" xmlns:p="http://schemas.openxmlformats.org/presentationml/2006/main">
+  <p:cSld>
+    <p:bg>
+      <p:bgPr>
+        <a:solidFill>
+          <a:srgbClr val="F3F6FA"/>
+        </a:solidFill>
+        <a:effectLst/>
+      </p:bgPr>
+    </p:bg>
+    <p:spTree>
+      <p:nvGrpSpPr>
+        <p:cNvPr id="1" name=""/>
+        <p:cNvGrpSpPr/>
+        <p:nvPr/>
+      </p:nvGrpSpPr>
+      <p:grpSpPr>
+        <a:xfrm>
+          <a:off x="0" y="0"/>
+          <a:ext cx="0" cy="0"/>
+          <a:chOff x="0" y="0"/>
+          <a:chExt cx="0" cy="0"/>
+        </a:xfrm>
+      </p:grpSpPr>
+      <p:sp>
+        <p:nvSpPr>
+          <p:cNvPr id="2" name="Shape 0"/>
+          <p:cNvSpPr/>
+          <p:nvPr/>
+        </p:nvSpPr>
+        <p:spPr>
+          <a:xfrm>
+            <a:off x="0" y="-523631"/>
+            <a:ext cx="12191695" cy="6858000"/>
+          </a:xfrm>
+          <a:prstGeom prst="rect">
+            <a:avLst/>
+          </a:prstGeom>
+          <a:solidFill>
+            <a:srgbClr val="F3F6FA"/>
+          </a:solidFill>
+          <a:ln w="12700">
+            <a:solidFill>
+              <a:srgbClr val="F3F6FA">
+                <a:alpha val="0"/>
+              </a:srgbClr>
+            </a:solidFill>
+            <a:prstDash val="solid"/>
+          </a:ln>
+        </p:spPr>
+      </p:sp>
+      <p:sp>
+        <p:nvSpPr>
+          <p:cNvPr id="3" name="Shape 1"/>
+          <p:cNvSpPr/>
+          <p:nvPr/>
+        </p:nvSpPr>
+        <p:spPr>
+          <a:xfrm>
+            <a:off x="0" y="-7815"/>
+            <a:ext cx="12191695" cy="621792"/>
+          </a:xfrm>
+          <a:prstGeom prst="rect">
+            <a:avLst/>
+          </a:prstGeom>
+          <a:solidFill>
+            <a:srgbClr val="FFFFFF"/>
+          </a:solidFill>
+          <a:ln w="12700">
+            <a:solidFill>
+              <a:srgbClr val="DBE8F5"/>
+            </a:solidFill>
+            <a:prstDash val="solid"/>
+          </a:ln>
+        </p:spPr>
+      </p:sp>
+      <p:sp>
+        <p:nvSpPr>
+          <p:cNvPr id="4" name="Text 2"/>
+          <p:cNvSpPr/>
+          <p:nvPr/>
+        </p:nvSpPr>
+        <p:spPr>
+          <a:xfrm>
+            <a:off x="502920" y="155448"/>
+            <a:ext cx="320040" cy="228600"/>
+          </a:xfrm>
+          <a:prstGeom prst="rect">
+            <a:avLst/>
+          </a:prstGeom>
+          <a:noFill/>
+          <a:ln/>
+        </p:spPr>
+        <p:txBody>
+          <a:bodyPr wrap="square" lIns="0" tIns="0" rIns="0" bIns="0" rtlCol="0" anchor="ctr"/>
+          <a:lstStyle/>
+          <a:p>
+            <a:pPr marL="0" indent="0">
+              <a:buNone/>
+            </a:pPr>
+            <a:r>
+              <a:rPr lang="en-US" sz="1700" b="1" dirty="0">
+                <a:solidFill>
+                  <a:srgbClr val="1F5F8B"/>
+                </a:solidFill>
+                <a:latin typeface="Segoe UI" pitchFamily="34" charset="0"/>
+                <a:ea typeface="Segoe UI" pitchFamily="34" charset="-122"/>
+                <a:cs typeface="Segoe UI" pitchFamily="34" charset="-120"/>
+              </a:rPr>
+              <a:t>✈</a:t>
+            </a:r>
+            <a:endParaRPr lang="en-US" sz="1700" dirty="0"/>
+          </a:p>
+        </p:txBody>
+      </p:sp>
+      <p:sp>
+        <p:nvSpPr>
+          <p:cNvPr id="5" name="Text 3"/>
+          <p:cNvSpPr/>
+          <p:nvPr/>
+        </p:nvSpPr>
+        <p:spPr>
+          <a:xfrm>
+            <a:off x="868680" y="73152"/>
+            <a:ext cx="1234440" cy="182880"/>
+          </a:xfrm>
+          <a:prstGeom prst="rect">
+            <a:avLst/>
+          </a:prstGeom>
+          <a:noFill/>
+          <a:ln/>
+        </p:spPr>
+        <p:txBody>
+          <a:bodyPr wrap="square" lIns="0" tIns="0" rIns="0" bIns="0" rtlCol="0" anchor="ctr"/>
+          <a:lstStyle/>
+          <a:p>
+            <a:pPr marL="0" indent="0">
+              <a:buNone/>
+            </a:pPr>
+            <a:r>
+              <a:rPr lang="en-US" sz="1600" b="1" dirty="0">
+                <a:solidFill>
+                  <a:srgbClr val="0D2340"/>
+                </a:solidFill>
+                <a:latin typeface="Segoe UI" pitchFamily="34" charset="0"/>
+                <a:ea typeface="Segoe UI" pitchFamily="34" charset="-122"/>
+                <a:cs typeface="Segoe UI" pitchFamily="34" charset="-120"/>
+              </a:rPr>
+              <a:t>AeroBaku</a:t>
+            </a:r>
+            <a:endParaRPr lang="en-US" sz="1600" dirty="0"/>
+          </a:p>
+        </p:txBody>
+      </p:sp>
+      <p:sp>
+        <p:nvSpPr>
+          <p:cNvPr id="6" name="Text 4"/>
+          <p:cNvSpPr/>
+          <p:nvPr/>
+        </p:nvSpPr>
+        <p:spPr>
+          <a:xfrm>
+            <a:off x="868680" y="393192"/>
+            <a:ext cx="1005840" cy="91440"/>
+          </a:xfrm>
+          <a:prstGeom prst="rect">
+            <a:avLst/>
+          </a:prstGeom>
+          <a:noFill/>
+          <a:ln/>
+        </p:spPr>
+        <p:txBody>
+          <a:bodyPr wrap="square" lIns="0" tIns="0" rIns="0" bIns="0" rtlCol="0" anchor="ctr"/>
+          <a:lstStyle/>
+          <a:p>
+            <a:pPr marL="0" indent="0">
+              <a:buNone/>
+            </a:pPr>
+            <a:r>
+              <a:rPr lang="en-US" sz="650" b="1" dirty="0">
+                <a:solidFill>
+                  <a:srgbClr val="667A92"/>
+                </a:solidFill>
+                <a:latin typeface="Segoe UI" pitchFamily="34" charset="0"/>
+                <a:ea typeface="Segoe UI" pitchFamily="34" charset="-122"/>
+                <a:cs typeface="Segoe UI" pitchFamily="34" charset="-120"/>
+              </a:rPr>
+              <a:t>AIRPORT</a:t>
+            </a:r>
+            <a:endParaRPr lang="en-US" sz="650" dirty="0"/>
+          </a:p>
+        </p:txBody>
+      </p:sp>
+      <p:sp>
+        <p:nvSpPr>
+          <p:cNvPr id="7" name="Shape 5"/>
+          <p:cNvSpPr/>
+          <p:nvPr/>
+        </p:nvSpPr>
+        <p:spPr>
+          <a:xfrm>
+            <a:off x="6976872" y="100584"/>
+            <a:ext cx="960120" cy="411480"/>
+          </a:xfrm>
+          <a:prstGeom prst="roundRect">
+            <a:avLst>
+              <a:gd name="adj" fmla="val 48889"/>
+            </a:avLst>
+          </a:prstGeom>
+          <a:solidFill>
+            <a:srgbClr val="E7F3FF"/>
+          </a:solidFill>
+          <a:ln w="12700">
+            <a:solidFill>
+              <a:srgbClr val="E7F3FF">
+                <a:alpha val="0"/>
+              </a:srgbClr>
+            </a:solidFill>
+            <a:prstDash val="solid"/>
+          </a:ln>
+        </p:spPr>
+      </p:sp>
+      <p:sp>
+        <p:nvSpPr>
+          <p:cNvPr id="8" name="Text 6"/>
+          <p:cNvSpPr/>
+          <p:nvPr/>
+        </p:nvSpPr>
+        <p:spPr>
+          <a:xfrm>
+            <a:off x="7086600" y="201168"/>
+            <a:ext cx="841248" cy="155448"/>
+          </a:xfrm>
+          <a:prstGeom prst="rect">
+            <a:avLst/>
+          </a:prstGeom>
+          <a:noFill/>
+          <a:ln/>
+        </p:spPr>
+        <p:txBody>
+          <a:bodyPr wrap="square" lIns="0" tIns="0" rIns="0" bIns="0" rtlCol="0" anchor="ctr"/>
+          <a:lstStyle/>
+          <a:p>
+            <a:pPr marL="0" indent="0" algn="ctr">
+              <a:buNone/>
+            </a:pPr>
+            <a:r>
+              <a:rPr lang="en-US" sz="980" b="1" dirty="0">
+                <a:solidFill>
+                  <a:srgbClr val="174A70"/>
+                </a:solidFill>
+                <a:latin typeface="Segoe UI" pitchFamily="34" charset="0"/>
+                <a:ea typeface="Segoe UI" pitchFamily="34" charset="-122"/>
+                <a:cs typeface="Segoe UI" pitchFamily="34" charset="-120"/>
+              </a:rPr>
+              <a:t>Главная</a:t>
+            </a:r>
+            <a:endParaRPr lang="en-US" sz="980" dirty="0"/>
+          </a:p>
+        </p:txBody>
+      </p:sp>
+      <p:sp>
+        <p:nvSpPr>
+          <p:cNvPr id="9" name="Text 7"/>
+          <p:cNvSpPr/>
+          <p:nvPr/>
+        </p:nvSpPr>
+        <p:spPr>
+          <a:xfrm>
+            <a:off x="8138160" y="201168"/>
+            <a:ext cx="841248" cy="155448"/>
+          </a:xfrm>
+          <a:prstGeom prst="rect">
+            <a:avLst/>
+          </a:prstGeom>
+          <a:noFill/>
+          <a:ln/>
+        </p:spPr>
+        <p:txBody>
+          <a:bodyPr wrap="square" lIns="0" tIns="0" rIns="0" bIns="0" rtlCol="0" anchor="ctr"/>
+          <a:lstStyle/>
+          <a:p>
+            <a:pPr marL="0" indent="0" algn="ctr">
+              <a:buNone/>
+            </a:pPr>
+            <a:r>
+              <a:rPr lang="en-US" sz="980" b="1" dirty="0">
+                <a:solidFill>
+                  <a:srgbClr val="667A92"/>
+                </a:solidFill>
+                <a:latin typeface="Segoe UI" pitchFamily="34" charset="0"/>
+                <a:ea typeface="Segoe UI" pitchFamily="34" charset="-122"/>
+                <a:cs typeface="Segoe UI" pitchFamily="34" charset="-120"/>
+              </a:rPr>
+              <a:t>Рейсы</a:t>
+            </a:r>
+            <a:endParaRPr lang="en-US" sz="980" dirty="0"/>
+          </a:p>
+        </p:txBody>
+      </p:sp>
+      <p:sp>
+        <p:nvSpPr>
+          <p:cNvPr id="10" name="Text 8"/>
+          <p:cNvSpPr/>
+          <p:nvPr/>
+        </p:nvSpPr>
+        <p:spPr>
+          <a:xfrm>
+            <a:off x="9189720" y="201168"/>
+            <a:ext cx="841248" cy="155448"/>
+          </a:xfrm>
+          <a:prstGeom prst="rect">
+            <a:avLst/>
+          </a:prstGeom>
+          <a:noFill/>
+          <a:ln/>
+        </p:spPr>
+        <p:txBody>
+          <a:bodyPr wrap="square" lIns="0" tIns="0" rIns="0" bIns="0" rtlCol="0" anchor="ctr"/>
+          <a:lstStyle/>
+          <a:p>
+            <a:pPr marL="0" indent="0" algn="ctr">
+              <a:buNone/>
+            </a:pPr>
+            <a:r>
+              <a:rPr lang="en-US" sz="980" b="1" dirty="0">
+                <a:solidFill>
+                  <a:srgbClr val="667A92"/>
+                </a:solidFill>
+                <a:latin typeface="Segoe UI" pitchFamily="34" charset="0"/>
+                <a:ea typeface="Segoe UI" pitchFamily="34" charset="-122"/>
+                <a:cs typeface="Segoe UI" pitchFamily="34" charset="-120"/>
+              </a:rPr>
+              <a:t>Сервисы</a:t>
+            </a:r>
+            <a:endParaRPr lang="en-US" sz="980" dirty="0"/>
+          </a:p>
+        </p:txBody>
+      </p:sp>
+      <p:sp>
+        <p:nvSpPr>
+          <p:cNvPr id="11" name="Text 9"/>
+          <p:cNvSpPr/>
+          <p:nvPr/>
+        </p:nvSpPr>
+        <p:spPr>
+          <a:xfrm>
+            <a:off x="10241280" y="201168"/>
+            <a:ext cx="841248" cy="155448"/>
+          </a:xfrm>
+          <a:prstGeom prst="rect">
+            <a:avLst/>
+          </a:prstGeom>
+          <a:noFill/>
+          <a:ln/>
+        </p:spPr>
+        <p:txBody>
+          <a:bodyPr wrap="square" lIns="0" tIns="0" rIns="0" bIns="0" rtlCol="0" anchor="ctr"/>
+          <a:lstStyle/>
+          <a:p>
+            <a:pPr marL="0" indent="0" algn="ctr">
+              <a:buNone/>
+            </a:pPr>
+            <a:r>
+              <a:rPr lang="en-US" sz="980" b="1" dirty="0">
+                <a:solidFill>
+                  <a:srgbClr val="667A92"/>
+                </a:solidFill>
+                <a:latin typeface="Segoe UI" pitchFamily="34" charset="0"/>
+                <a:ea typeface="Segoe UI" pitchFamily="34" charset="-122"/>
+                <a:cs typeface="Segoe UI" pitchFamily="34" charset="-120"/>
+              </a:rPr>
+              <a:t>Поддержка</a:t>
+            </a:r>
+            <a:endParaRPr lang="en-US" sz="980" dirty="0"/>
+          </a:p>
+        </p:txBody>
+      </p:sp>
+      <p:sp>
+        <p:nvSpPr>
+          <p:cNvPr id="12" name="Text 10"/>
+          <p:cNvSpPr/>
+          <p:nvPr/>
+        </p:nvSpPr>
+        <p:spPr>
+          <a:xfrm>
+            <a:off x="594360" y="914400"/>
+            <a:ext cx="2011680" cy="164592"/>
+          </a:xfrm>
+          <a:prstGeom prst="rect">
+            <a:avLst/>
+          </a:prstGeom>
+          <a:noFill/>
+          <a:ln/>
+        </p:spPr>
+        <p:txBody>
+          <a:bodyPr wrap="square" lIns="0" tIns="0" rIns="0" bIns="0" rtlCol="0" anchor="ctr"/>
+          <a:lstStyle/>
+          <a:p>
+            <a:pPr marL="0" indent="0">
+              <a:buNone/>
+            </a:pPr>
+            <a:r>
+              <a:rPr lang="en-US" sz="850" b="1" dirty="0">
+                <a:solidFill>
+                  <a:srgbClr val="1F5F8B"/>
+                </a:solidFill>
+                <a:latin typeface="Segoe UI" pitchFamily="34" charset="0"/>
+                <a:ea typeface="Segoe UI" pitchFamily="34" charset="-122"/>
+                <a:cs typeface="Segoe UI" pitchFamily="34" charset="-120"/>
+              </a:rPr>
+              <a:t>ЦЕЛЬ ПРОЕКТА</a:t>
+            </a:r>
+            <a:endParaRPr lang="en-US" sz="850" dirty="0"/>
+          </a:p>
+        </p:txBody>
+      </p:sp>
+      <p:sp>
+        <p:nvSpPr>
+          <p:cNvPr id="13" name="Text 11"/>
+          <p:cNvSpPr/>
+          <p:nvPr/>
+        </p:nvSpPr>
+        <p:spPr>
+          <a:xfrm>
+            <a:off x="594360" y="1234440"/>
+            <a:ext cx="4754880" cy="731520"/>
+          </a:xfrm>
+          <a:prstGeom prst="rect">
+            <a:avLst/>
+          </a:prstGeom>
+          <a:noFill/>
+          <a:ln/>
+        </p:spPr>
+        <p:txBody>
+          <a:bodyPr wrap="square" lIns="0" tIns="0" rIns="0" bIns="0" rtlCol="0" anchor="ctr">
+            <a:normAutofit/>
+          </a:bodyPr>
+          <a:lstStyle/>
+          <a:p>
+            <a:r>
+              <a:rPr lang="ru-RU" sz="2800" b="1" dirty="0"/>
+              <a:t>Используемые технологии</a:t>
+            </a:r>
+            <a:endParaRPr lang="en-US" sz="2800" b="1" dirty="0"/>
+          </a:p>
+        </p:txBody>
+      </p:sp>
+      <p:sp>
+        <p:nvSpPr>
+          <p:cNvPr id="14" name="Shape 12"/>
+          <p:cNvSpPr/>
+          <p:nvPr/>
+        </p:nvSpPr>
+        <p:spPr>
+          <a:xfrm>
+            <a:off x="640080" y="2532888"/>
+            <a:ext cx="164592" cy="164592"/>
+          </a:xfrm>
+          <a:prstGeom prst="ellipse">
+            <a:avLst/>
+          </a:prstGeom>
+          <a:solidFill>
+            <a:srgbClr val="1F5F8B"/>
+          </a:solidFill>
+          <a:ln w="12700">
+            <a:solidFill>
+              <a:srgbClr val="1F5F8B">
+                <a:alpha val="0"/>
+              </a:srgbClr>
+            </a:solidFill>
+            <a:prstDash val="solid"/>
+          </a:ln>
+        </p:spPr>
+      </p:sp>
+      <p:sp>
+        <p:nvSpPr>
+          <p:cNvPr id="15" name="Text 13"/>
+          <p:cNvSpPr/>
+          <p:nvPr/>
+        </p:nvSpPr>
+        <p:spPr>
+          <a:xfrm>
+            <a:off x="932688" y="2514600"/>
+            <a:ext cx="4370832" cy="201168"/>
+          </a:xfrm>
+          <a:prstGeom prst="rect">
+            <a:avLst/>
+          </a:prstGeom>
+          <a:noFill/>
+          <a:ln/>
+        </p:spPr>
+        <p:txBody>
+          <a:bodyPr wrap="square" lIns="0" tIns="0" rIns="0" bIns="0" rtlCol="0" anchor="ctr"/>
+          <a:lstStyle/>
+          <a:p>
+            <a:pPr marL="0" indent="0">
+              <a:buNone/>
+            </a:pPr>
+            <a:r>
+              <a:rPr lang="en-US" sz="1330" b="1" dirty="0">
+                <a:solidFill>
+                  <a:srgbClr val="0D2340"/>
+                </a:solidFill>
+                <a:latin typeface="Segoe UI" pitchFamily="34" charset="0"/>
+                <a:ea typeface="Segoe UI" pitchFamily="34" charset="-122"/>
+                <a:cs typeface="Segoe UI" pitchFamily="34" charset="-120"/>
+              </a:rPr>
+              <a:t>HTML</a:t>
+            </a:r>
+            <a:endParaRPr lang="en-US" sz="1330" dirty="0"/>
+          </a:p>
+        </p:txBody>
+      </p:sp>
+      <p:sp>
+        <p:nvSpPr>
+          <p:cNvPr id="16" name="Text 14"/>
+          <p:cNvSpPr/>
+          <p:nvPr/>
+        </p:nvSpPr>
+        <p:spPr>
+          <a:xfrm>
+            <a:off x="932688" y="2770632"/>
+            <a:ext cx="4370832" cy="320040"/>
+          </a:xfrm>
+          <a:prstGeom prst="rect">
+            <a:avLst/>
+          </a:prstGeom>
+          <a:noFill/>
+          <a:ln/>
+        </p:spPr>
+        <p:txBody>
+          <a:bodyPr wrap="square" lIns="0" tIns="0" rIns="0" bIns="0" rtlCol="0" anchor="ctr">
+            <a:normAutofit/>
+          </a:bodyPr>
+          <a:lstStyle/>
+          <a:p>
+            <a:r>
+              <a:rPr lang="ru-RU" sz="1200" dirty="0"/>
+              <a:t>создание структуры страниц сайта</a:t>
+            </a:r>
+            <a:endParaRPr lang="en-US" sz="1110" dirty="0"/>
+          </a:p>
+        </p:txBody>
+      </p:sp>
+      <p:sp>
+        <p:nvSpPr>
+          <p:cNvPr id="17" name="Shape 15"/>
+          <p:cNvSpPr/>
+          <p:nvPr/>
+        </p:nvSpPr>
+        <p:spPr>
+          <a:xfrm>
+            <a:off x="640080" y="3419856"/>
+            <a:ext cx="164592" cy="164592"/>
+          </a:xfrm>
+          <a:prstGeom prst="ellipse">
+            <a:avLst/>
+          </a:prstGeom>
+          <a:solidFill>
+            <a:srgbClr val="1F5F8B"/>
+          </a:solidFill>
+          <a:ln w="12700">
+            <a:solidFill>
+              <a:srgbClr val="1F5F8B">
+                <a:alpha val="0"/>
+              </a:srgbClr>
+            </a:solidFill>
+            <a:prstDash val="solid"/>
+          </a:ln>
+        </p:spPr>
+      </p:sp>
+      <p:sp>
+        <p:nvSpPr>
+          <p:cNvPr id="18" name="Text 16"/>
+          <p:cNvSpPr/>
+          <p:nvPr/>
+        </p:nvSpPr>
+        <p:spPr>
+          <a:xfrm>
+            <a:off x="932688" y="3401568"/>
+            <a:ext cx="4370832" cy="201168"/>
+          </a:xfrm>
+          <a:prstGeom prst="rect">
+            <a:avLst/>
+          </a:prstGeom>
+          <a:noFill/>
+          <a:ln/>
+        </p:spPr>
+        <p:txBody>
+          <a:bodyPr wrap="square" lIns="0" tIns="0" rIns="0" bIns="0" rtlCol="0" anchor="ctr"/>
+          <a:lstStyle/>
+          <a:p>
+            <a:pPr marL="0" indent="0">
+              <a:buNone/>
+            </a:pPr>
+            <a:r>
+              <a:rPr lang="en-US" sz="1330" b="1" dirty="0">
+                <a:solidFill>
+                  <a:srgbClr val="0D2340"/>
+                </a:solidFill>
+                <a:latin typeface="Segoe UI" pitchFamily="34" charset="0"/>
+                <a:ea typeface="Segoe UI" pitchFamily="34" charset="-122"/>
+                <a:cs typeface="Segoe UI" pitchFamily="34" charset="-120"/>
+              </a:rPr>
+              <a:t>CSS</a:t>
+            </a:r>
+            <a:endParaRPr lang="en-US" sz="1330" dirty="0"/>
+          </a:p>
+        </p:txBody>
+      </p:sp>
+      <p:sp>
+        <p:nvSpPr>
+          <p:cNvPr id="19" name="Text 17"/>
+          <p:cNvSpPr/>
+          <p:nvPr/>
+        </p:nvSpPr>
+        <p:spPr>
+          <a:xfrm>
+            <a:off x="932688" y="3657600"/>
+            <a:ext cx="4370832" cy="320040"/>
+          </a:xfrm>
+          <a:prstGeom prst="rect">
+            <a:avLst/>
+          </a:prstGeom>
+          <a:noFill/>
+          <a:ln/>
+        </p:spPr>
+        <p:txBody>
+          <a:bodyPr wrap="square" lIns="0" tIns="0" rIns="0" bIns="0" rtlCol="0" anchor="ctr">
+            <a:normAutofit/>
+          </a:bodyPr>
+          <a:lstStyle/>
+          <a:p>
+            <a:r>
+              <a:rPr lang="ru-RU" sz="1200" dirty="0"/>
+              <a:t>оформление интерфейса и адаптивный дизайн</a:t>
+            </a:r>
+            <a:endParaRPr lang="en-US" sz="1110" dirty="0"/>
+          </a:p>
+        </p:txBody>
+      </p:sp>
+      <p:sp>
+        <p:nvSpPr>
+          <p:cNvPr id="20" name="Shape 18"/>
+          <p:cNvSpPr/>
+          <p:nvPr/>
+        </p:nvSpPr>
+        <p:spPr>
+          <a:xfrm>
+            <a:off x="640080" y="4315968"/>
+            <a:ext cx="164592" cy="164592"/>
+          </a:xfrm>
+          <a:prstGeom prst="ellipse">
+            <a:avLst/>
+          </a:prstGeom>
+          <a:solidFill>
+            <a:srgbClr val="1F5F8B"/>
+          </a:solidFill>
+          <a:ln w="12700">
+            <a:solidFill>
+              <a:srgbClr val="1F5F8B">
+                <a:alpha val="0"/>
+              </a:srgbClr>
+            </a:solidFill>
+            <a:prstDash val="solid"/>
+          </a:ln>
+        </p:spPr>
+      </p:sp>
+      <p:sp>
+        <p:nvSpPr>
+          <p:cNvPr id="21" name="Text 19"/>
+          <p:cNvSpPr/>
+          <p:nvPr/>
+        </p:nvSpPr>
+        <p:spPr>
+          <a:xfrm>
+            <a:off x="932688" y="4297680"/>
+            <a:ext cx="4370832" cy="201168"/>
+          </a:xfrm>
+          <a:prstGeom prst="rect">
+            <a:avLst/>
+          </a:prstGeom>
+          <a:noFill/>
+          <a:ln/>
+        </p:spPr>
+        <p:txBody>
+          <a:bodyPr wrap="square" lIns="0" tIns="0" rIns="0" bIns="0" rtlCol="0" anchor="ctr"/>
+          <a:lstStyle/>
+          <a:p>
+            <a:pPr marL="0" indent="0">
+              <a:buNone/>
+            </a:pPr>
+            <a:r>
+              <a:rPr lang="en-US" sz="1330" b="1" dirty="0">
+                <a:solidFill>
+                  <a:srgbClr val="0D2340"/>
+                </a:solidFill>
+                <a:latin typeface="Segoe UI" pitchFamily="34" charset="0"/>
+                <a:ea typeface="Segoe UI" pitchFamily="34" charset="-122"/>
+                <a:cs typeface="Segoe UI" pitchFamily="34" charset="-120"/>
+              </a:rPr>
+              <a:t>JavaScript</a:t>
+            </a:r>
+            <a:endParaRPr lang="en-US" sz="1330" dirty="0"/>
+          </a:p>
+        </p:txBody>
+      </p:sp>
+      <p:sp>
+        <p:nvSpPr>
+          <p:cNvPr id="22" name="Text 20"/>
+          <p:cNvSpPr/>
+          <p:nvPr/>
+        </p:nvSpPr>
+        <p:spPr>
+          <a:xfrm>
+            <a:off x="932688" y="4553712"/>
+            <a:ext cx="4370832" cy="320040"/>
+          </a:xfrm>
+          <a:prstGeom prst="rect">
+            <a:avLst/>
+          </a:prstGeom>
+          <a:noFill/>
+          <a:ln/>
+        </p:spPr>
+        <p:txBody>
+          <a:bodyPr wrap="square" lIns="0" tIns="0" rIns="0" bIns="0" rtlCol="0" anchor="ctr">
+            <a:normAutofit/>
+          </a:bodyPr>
+          <a:lstStyle/>
+          <a:p>
+            <a:r>
+              <a:rPr lang="ru-RU" sz="1200" dirty="0"/>
+              <a:t>интерактивность, поиск, фильтрация и работа с данными</a:t>
+            </a:r>
+            <a:endParaRPr lang="en-US" sz="1110" dirty="0"/>
+          </a:p>
+        </p:txBody>
+      </p:sp>
+      <p:sp>
+        <p:nvSpPr>
+          <p:cNvPr id="26" name="Text 23"/>
+          <p:cNvSpPr/>
+          <p:nvPr/>
+        </p:nvSpPr>
+        <p:spPr>
+          <a:xfrm>
+            <a:off x="11292840" y="6446520"/>
+            <a:ext cx="457200" cy="164592"/>
+          </a:xfrm>
+          <a:prstGeom prst="rect">
+            <a:avLst/>
+          </a:prstGeom>
+          <a:noFill/>
+          <a:ln/>
+        </p:spPr>
+        <p:txBody>
+          <a:bodyPr wrap="square" lIns="0" tIns="0" rIns="0" bIns="0" rtlCol="0" anchor="ctr"/>
+          <a:lstStyle/>
+          <a:p>
+            <a:pPr marL="0" indent="0" algn="r">
+              <a:buNone/>
+            </a:pPr>
+            <a:r>
+              <a:rPr lang="en-US" sz="850" dirty="0">
+                <a:solidFill>
+                  <a:srgbClr val="667A92"/>
+                </a:solidFill>
+                <a:latin typeface="Segoe UI" pitchFamily="34" charset="0"/>
+                <a:ea typeface="Segoe UI" pitchFamily="34" charset="-122"/>
+                <a:cs typeface="Segoe UI" pitchFamily="34" charset="-120"/>
+              </a:rPr>
+              <a:t>2/6</a:t>
+            </a:r>
+            <a:endParaRPr lang="en-US" sz="850" dirty="0"/>
+          </a:p>
+        </p:txBody>
+      </p:sp>
+      <p:sp>
+        <p:nvSpPr>
+          <p:cNvPr id="27" name="Shape 24"/>
+          <p:cNvSpPr/>
+          <p:nvPr/>
+        </p:nvSpPr>
+        <p:spPr>
+          <a:xfrm>
+            <a:off x="502920" y="6483096"/>
+            <a:ext cx="1371600" cy="0"/>
+          </a:xfrm>
+          <a:prstGeom prst="line">
+            <a:avLst/>
+          </a:prstGeom>
+          <a:noFill/>
+          <a:ln w="12700">
+            <a:solidFill>
+              <a:srgbClr val="DBE8F5"/>
+            </a:solidFill>
+            <a:prstDash val="solid"/>
+          </a:ln>
+        </p:spPr>
+      </p:sp>
+      <p:sp>
+        <p:nvSpPr>
+          <p:cNvPr id="28" name="Shape 18">
+            <a:extLst>
+              <a:ext uri="{FF2B5EF4-FFF2-40B4-BE49-F238E27FC236}">
+                <a16:creationId xmlns:a16="http://schemas.microsoft.com/office/drawing/2014/main" id="{9203ACCE-A278-47D6-B9D9-5BD6EE3F197C}"/>
+              </a:ext>
+            </a:extLst>
+          </p:cNvPr>
+          <p:cNvSpPr/>
+          <p:nvPr/>
+        </p:nvSpPr>
+        <p:spPr>
+          <a:xfrm>
+            <a:off x="664112" y="5322511"/>
+            <a:ext cx="164592" cy="164592"/>
+          </a:xfrm>
+          <a:prstGeom prst="ellipse">
+            <a:avLst/>
+          </a:prstGeom>
+          <a:solidFill>
+            <a:srgbClr val="1F5F8B"/>
+          </a:solidFill>
+          <a:ln w="12700">
+            <a:solidFill>
+              <a:srgbClr val="1F5F8B">
+                <a:alpha val="0"/>
+              </a:srgbClr>
+            </a:solidFill>
+            <a:prstDash val="solid"/>
+          </a:ln>
+        </p:spPr>
+      </p:sp>
+      <p:sp>
+        <p:nvSpPr>
+          <p:cNvPr id="29" name="TextBox 28">
+            <a:extLst>
+              <a:ext uri="{FF2B5EF4-FFF2-40B4-BE49-F238E27FC236}">
+                <a16:creationId xmlns:a16="http://schemas.microsoft.com/office/drawing/2014/main" id="{3877A34F-4D5E-4B69-A774-6C54F31DA0D5}"/>
+              </a:ext>
+            </a:extLst>
+          </p:cNvPr>
+          <p:cNvSpPr txBox="1"/>
+          <p:nvPr/>
+        </p:nvSpPr>
+        <p:spPr>
+          <a:xfrm>
+            <a:off x="903458" y="5258613"/>
+            <a:ext cx="2350349" cy="292388"/>
+          </a:xfrm>
+          <a:prstGeom prst="rect">
+            <a:avLst/>
+          </a:prstGeom>
+          <a:noFill/>
+        </p:spPr>
+        <p:txBody>
+          <a:bodyPr wrap="square" rtlCol="0">
+            <a:spAutoFit/>
+          </a:bodyPr>
+          <a:lstStyle/>
+          <a:p>
+            <a:r>
+              <a:rPr lang="en-US" sz="1300" b="1" dirty="0" err="1"/>
+              <a:t>localStorage</a:t>
+            </a:r>
+            <a:endParaRPr lang="en-US" sz="1300" b="1" dirty="0"/>
+          </a:p>
+        </p:txBody>
+      </p:sp>
+      <p:sp>
+        <p:nvSpPr>
+          <p:cNvPr id="30" name="TextBox 29">
+            <a:extLst>
+              <a:ext uri="{FF2B5EF4-FFF2-40B4-BE49-F238E27FC236}">
+                <a16:creationId xmlns:a16="http://schemas.microsoft.com/office/drawing/2014/main" id="{290C03A6-D2C0-4E49-AE34-E11509472192}"/>
+              </a:ext>
+            </a:extLst>
+          </p:cNvPr>
+          <p:cNvSpPr txBox="1"/>
+          <p:nvPr/>
+        </p:nvSpPr>
+        <p:spPr>
+          <a:xfrm>
+            <a:off x="868680" y="5552872"/>
+            <a:ext cx="3887373" cy="461665"/>
+          </a:xfrm>
+          <a:prstGeom prst="rect">
+            <a:avLst/>
+          </a:prstGeom>
+          <a:noFill/>
+        </p:spPr>
+        <p:txBody>
+          <a:bodyPr wrap="square" rtlCol="0">
+            <a:spAutoFit/>
+          </a:bodyPr>
+          <a:lstStyle/>
+          <a:p>
+            <a:r>
+              <a:rPr lang="ru-RU" sz="1200" dirty="0"/>
+              <a:t>сохранение отслеживаемых рейсов и обращений пользователя в браузере</a:t>
+            </a:r>
+            <a:endParaRPr lang="en-US" sz="1200" dirty="0"/>
+          </a:p>
+        </p:txBody>
+      </p:sp>
+      <p:pic>
+        <p:nvPicPr>
+          <p:cNvPr id="32" name="Picture 31">
+            <a:extLst>
+              <a:ext uri="{FF2B5EF4-FFF2-40B4-BE49-F238E27FC236}">
+                <a16:creationId xmlns:a16="http://schemas.microsoft.com/office/drawing/2014/main" id="{77426E47-F6A7-4233-871F-83DE205AA1A9}"/>
+              </a:ext>
+            </a:extLst>
+          </p:cNvPr>
+          <p:cNvPicPr>
+            <a:picLocks noChangeAspect="1"/>
+          </p:cNvPicPr>
+          <p:nvPr/>
+        </p:nvPicPr>
+        <p:blipFill>
+          <a:blip r:embed="rId3"/>
+          <a:stretch>
+            <a:fillRect/>
+          </a:stretch>
+        </p:blipFill>
+        <p:spPr>
+          <a:xfrm>
+            <a:off x="6092118" y="822960"/>
+            <a:ext cx="2278159" cy="2674935"/>
+          </a:xfrm>
+          <a:prstGeom prst="rect">
+            <a:avLst/>
+          </a:prstGeom>
+        </p:spPr>
+      </p:pic>
+      <p:sp>
+        <p:nvSpPr>
+          <p:cNvPr id="33" name="Oval 32">
+            <a:extLst>
+              <a:ext uri="{FF2B5EF4-FFF2-40B4-BE49-F238E27FC236}">
+                <a16:creationId xmlns:a16="http://schemas.microsoft.com/office/drawing/2014/main" id="{DC10BE5F-FA87-4A0F-AE54-94FFE4834FA4}"/>
+              </a:ext>
+            </a:extLst>
+          </p:cNvPr>
+          <p:cNvSpPr/>
+          <p:nvPr/>
+        </p:nvSpPr>
+        <p:spPr>
+          <a:xfrm>
+            <a:off x="6141567" y="866394"/>
+            <a:ext cx="352161" cy="260604"/>
+          </a:xfrm>
+          <a:prstGeom prst="ellipse">
+            <a:avLst/>
+          </a:prstGeom>
+          <a:solidFill>
+            <a:srgbClr val="FFFFFF"/>
+          </a:solidFill>
+          <a:ln>
+            <a:solidFill>
+              <a:schemeClr val="bg1"/>
+            </a:solidFill>
+          </a:ln>
+        </p:spPr>
+        <p:style>
+          <a:lnRef idx="2">
+            <a:schemeClr val="accent1">
+              <a:shade val="50000"/>
+            </a:schemeClr>
+          </a:lnRef>
+          <a:fillRef idx="1">
+            <a:schemeClr val="accent1"/>
+          </a:fillRef>
+          <a:effectRef idx="0">
+            <a:schemeClr val="accent1"/>
+          </a:effectRef>
+          <a:fontRef idx="minor">
+            <a:schemeClr val="lt1"/>
+          </a:fontRef>
+        </p:style>
+        <p:txBody>
+          <a:bodyPr rtlCol="0" anchor="ctr"/>
+          <a:lstStyle/>
+          <a:p>
+            <a:pPr algn="ctr"/>
+            <a:endParaRPr lang="en-US"/>
+          </a:p>
+        </p:txBody>
+      </p:sp>
+      <p:pic>
+        <p:nvPicPr>
+          <p:cNvPr id="35" name="Picture 34">
+            <a:extLst>
+              <a:ext uri="{FF2B5EF4-FFF2-40B4-BE49-F238E27FC236}">
+                <a16:creationId xmlns:a16="http://schemas.microsoft.com/office/drawing/2014/main" id="{3BEFFE1D-6189-48A2-BDA4-9E5BF47DA868}"/>
+              </a:ext>
+            </a:extLst>
+          </p:cNvPr>
+          <p:cNvPicPr>
+            <a:picLocks noChangeAspect="1"/>
+          </p:cNvPicPr>
+          <p:nvPr/>
+        </p:nvPicPr>
+        <p:blipFill>
+          <a:blip r:embed="rId4"/>
+          <a:stretch>
+            <a:fillRect/>
+          </a:stretch>
+        </p:blipFill>
+        <p:spPr>
+          <a:xfrm>
+            <a:off x="8640805" y="866394"/>
+            <a:ext cx="2278159" cy="2631501"/>
+          </a:xfrm>
+          <a:prstGeom prst="rect">
+            <a:avLst/>
+          </a:prstGeom>
+        </p:spPr>
+      </p:pic>
+      <p:sp>
+        <p:nvSpPr>
+          <p:cNvPr id="36" name="Oval 35">
+            <a:extLst>
+              <a:ext uri="{FF2B5EF4-FFF2-40B4-BE49-F238E27FC236}">
+                <a16:creationId xmlns:a16="http://schemas.microsoft.com/office/drawing/2014/main" id="{F9DF07A9-F241-4354-857F-3C51468ABC01}"/>
+              </a:ext>
+            </a:extLst>
+          </p:cNvPr>
+          <p:cNvSpPr/>
+          <p:nvPr/>
+        </p:nvSpPr>
+        <p:spPr>
+          <a:xfrm>
+            <a:off x="8691553" y="866394"/>
+            <a:ext cx="352161" cy="260604"/>
+          </a:xfrm>
+          <a:prstGeom prst="ellipse">
+            <a:avLst/>
+          </a:prstGeom>
+          <a:solidFill>
+            <a:srgbClr val="FFFFFF"/>
+          </a:solidFill>
+          <a:ln>
+            <a:solidFill>
+              <a:schemeClr val="bg1"/>
+            </a:solidFill>
+          </a:ln>
+        </p:spPr>
+        <p:style>
+          <a:lnRef idx="2">
+            <a:schemeClr val="accent1">
+              <a:shade val="50000"/>
+            </a:schemeClr>
+          </a:lnRef>
+          <a:fillRef idx="1">
+            <a:schemeClr val="accent1"/>
+          </a:fillRef>
+          <a:effectRef idx="0">
+            <a:schemeClr val="accent1"/>
+          </a:effectRef>
+          <a:fontRef idx="minor">
+            <a:schemeClr val="lt1"/>
+          </a:fontRef>
+        </p:style>
+        <p:txBody>
+          <a:bodyPr rtlCol="0" anchor="ctr"/>
+          <a:lstStyle/>
+          <a:p>
+            <a:pPr algn="ctr"/>
+            <a:endParaRPr lang="en-US"/>
+          </a:p>
+        </p:txBody>
+      </p:sp>
+      <p:pic>
+        <p:nvPicPr>
+          <p:cNvPr id="38" name="Picture 37">
+            <a:extLst>
+              <a:ext uri="{FF2B5EF4-FFF2-40B4-BE49-F238E27FC236}">
+                <a16:creationId xmlns:a16="http://schemas.microsoft.com/office/drawing/2014/main" id="{A93DC1B4-987F-4CBF-BEB9-677FB8FE0200}"/>
+              </a:ext>
+            </a:extLst>
+          </p:cNvPr>
+          <p:cNvPicPr>
+            <a:picLocks noChangeAspect="1"/>
+          </p:cNvPicPr>
+          <p:nvPr/>
+        </p:nvPicPr>
+        <p:blipFill>
+          <a:blip r:embed="rId5"/>
+          <a:stretch>
+            <a:fillRect/>
+          </a:stretch>
+        </p:blipFill>
+        <p:spPr>
+          <a:xfrm>
+            <a:off x="6141567" y="3701407"/>
+            <a:ext cx="2278159" cy="2727840"/>
+          </a:xfrm>
+          <a:prstGeom prst="rect">
+            <a:avLst/>
+          </a:prstGeom>
+        </p:spPr>
+      </p:pic>
+      <p:sp>
+        <p:nvSpPr>
+          <p:cNvPr id="39" name="Oval 38">
+            <a:extLst>
+              <a:ext uri="{FF2B5EF4-FFF2-40B4-BE49-F238E27FC236}">
+                <a16:creationId xmlns:a16="http://schemas.microsoft.com/office/drawing/2014/main" id="{0595AA53-4D6C-4A98-BCF1-2BAAC2B29E04}"/>
+              </a:ext>
+            </a:extLst>
+          </p:cNvPr>
+          <p:cNvSpPr/>
+          <p:nvPr/>
+        </p:nvSpPr>
+        <p:spPr>
+          <a:xfrm>
+            <a:off x="6092118" y="3717036"/>
+            <a:ext cx="352161" cy="260604"/>
+          </a:xfrm>
+          <a:prstGeom prst="ellipse">
+            <a:avLst/>
+          </a:prstGeom>
+          <a:solidFill>
+            <a:srgbClr val="FFFFFF"/>
+          </a:solidFill>
+          <a:ln>
+            <a:solidFill>
+              <a:schemeClr val="bg1"/>
+            </a:solidFill>
+          </a:ln>
+        </p:spPr>
+        <p:style>
+          <a:lnRef idx="2">
+            <a:schemeClr val="accent1">
+              <a:shade val="50000"/>
+            </a:schemeClr>
+          </a:lnRef>
+          <a:fillRef idx="1">
+            <a:schemeClr val="accent1"/>
+          </a:fillRef>
+          <a:effectRef idx="0">
+            <a:schemeClr val="accent1"/>
+          </a:effectRef>
+          <a:fontRef idx="minor">
+            <a:schemeClr val="lt1"/>
+          </a:fontRef>
+        </p:style>
+        <p:txBody>
+          <a:bodyPr rtlCol="0" anchor="ctr"/>
+          <a:lstStyle/>
+          <a:p>
+            <a:pPr algn="ctr"/>
+            <a:endParaRPr lang="en-US"/>
+          </a:p>
+        </p:txBody>
+      </p:sp>
+      <p:pic>
+        <p:nvPicPr>
+          <p:cNvPr id="42" name="Picture 41">
+            <a:extLst>
+              <a:ext uri="{FF2B5EF4-FFF2-40B4-BE49-F238E27FC236}">
+                <a16:creationId xmlns:a16="http://schemas.microsoft.com/office/drawing/2014/main" id="{6E9D47B3-D6A3-4CAA-A39E-55855CFE5EBA}"/>
+              </a:ext>
+            </a:extLst>
+          </p:cNvPr>
+          <p:cNvPicPr>
+            <a:picLocks noChangeAspect="1"/>
+          </p:cNvPicPr>
+          <p:nvPr/>
+        </p:nvPicPr>
+        <p:blipFill>
+          <a:blip r:embed="rId6"/>
+          <a:stretch>
+            <a:fillRect/>
+          </a:stretch>
+        </p:blipFill>
+        <p:spPr>
+          <a:xfrm>
+            <a:off x="8642104" y="3678815"/>
+            <a:ext cx="2276860" cy="2729918"/>
+          </a:xfrm>
+          <a:prstGeom prst="rect">
+            <a:avLst/>
+          </a:prstGeom>
+        </p:spPr>
+      </p:pic>
+      <p:sp>
+        <p:nvSpPr>
+          <p:cNvPr id="44" name="Oval 43">
+            <a:extLst>
+              <a:ext uri="{FF2B5EF4-FFF2-40B4-BE49-F238E27FC236}">
+                <a16:creationId xmlns:a16="http://schemas.microsoft.com/office/drawing/2014/main" id="{EC4B83E3-1AD9-406B-899D-5EE5307783DC}"/>
+              </a:ext>
+            </a:extLst>
+          </p:cNvPr>
+          <p:cNvSpPr/>
+          <p:nvPr/>
+        </p:nvSpPr>
+        <p:spPr>
+          <a:xfrm>
+            <a:off x="8640805" y="3717036"/>
+            <a:ext cx="352161" cy="260604"/>
+          </a:xfrm>
+          <a:prstGeom prst="ellipse">
+            <a:avLst/>
+          </a:prstGeom>
+          <a:solidFill>
+            <a:srgbClr val="FFFFFF"/>
+          </a:solidFill>
+          <a:ln>
+            <a:solidFill>
+              <a:schemeClr val="bg1"/>
+            </a:solidFill>
+          </a:ln>
+        </p:spPr>
+        <p:style>
+          <a:lnRef idx="2">
+            <a:schemeClr val="accent1">
+              <a:shade val="50000"/>
+            </a:schemeClr>
+          </a:lnRef>
+          <a:fillRef idx="1">
+            <a:schemeClr val="accent1"/>
+          </a:fillRef>
+          <a:effectRef idx="0">
+            <a:schemeClr val="accent1"/>
+          </a:effectRef>
+          <a:fontRef idx="minor">
+            <a:schemeClr val="lt1"/>
+          </a:fontRef>
+        </p:style>
+        <p:txBody>
+          <a:bodyPr rtlCol="0" anchor="ctr"/>
+          <a:lstStyle/>
+          <a:p>
+            <a:pPr algn="ctr"/>
+            <a:endParaRPr lang="en-US"/>
+          </a:p>
+        </p:txBody>
+      </p:sp>
+    </p:spTree>
+    <p:extLst>
+      <p:ext uri="{BB962C8B-B14F-4D97-AF65-F5344CB8AC3E}">
+        <p14:creationId xmlns:p14="http://schemas.microsoft.com/office/powerpoint/2010/main" val="1760891041"/>
+      </p:ext>
+    </p:extLst>
+  </p:cSld>
+  <p:clrMapOvr>
+    <a:masterClrMapping/>
+  </p:clrMapOvr>
+</p:sld>
+</file>
+
+<file path=ppt/slides/slide4.xml><?xml version="1.0" encoding="utf-8"?>
 <p:sld xmlns:a="http://schemas.openxmlformats.org/drawingml/2006/main" xmlns:r="http://schemas.openxmlformats.org/officeDocument/2006/relationships" xmlns:p="http://schemas.openxmlformats.org/presentationml/2006/main">
   <p:cSld name="Slide 3">
     <p:bg>
@@ -4309,7 +5623,7 @@
 </p:sld>
 </file>
 
-<file path=ppt/slides/slide4.xml><?xml version="1.0" encoding="utf-8"?>
+<file path=ppt/slides/slide5.xml><?xml version="1.0" encoding="utf-8"?>
 <p:sld xmlns:a="http://schemas.openxmlformats.org/drawingml/2006/main" xmlns:r="http://schemas.openxmlformats.org/officeDocument/2006/relationships" xmlns:p="http://schemas.openxmlformats.org/presentationml/2006/main">
   <p:cSld name="Slide 4">
     <p:bg>
@@ -5118,7 +6432,7 @@
 </p:sld>
 </file>
 
-<file path=ppt/slides/slide5.xml><?xml version="1.0" encoding="utf-8"?>
+<file path=ppt/slides/slide6.xml><?xml version="1.0" encoding="utf-8"?>
 <p:sld xmlns:a="http://schemas.openxmlformats.org/drawingml/2006/main" xmlns:r="http://schemas.openxmlformats.org/officeDocument/2006/relationships" xmlns:p="http://schemas.openxmlformats.org/presentationml/2006/main">
   <p:cSld name="Slide 5">
     <p:bg>
@@ -5910,7 +7224,7 @@
 </p:sld>
 </file>
 
-<file path=ppt/slides/slide6.xml><?xml version="1.0" encoding="utf-8"?>
+<file path=ppt/slides/slide7.xml><?xml version="1.0" encoding="utf-8"?>
 <p:sld xmlns:a="http://schemas.openxmlformats.org/drawingml/2006/main" xmlns:r="http://schemas.openxmlformats.org/officeDocument/2006/relationships" xmlns:p="http://schemas.openxmlformats.org/presentationml/2006/main">
   <p:cSld name="Slide 6">
     <p:bg>
